--- a/report/Kenya_Road_Accident_Analytics_10_Slide_Deck_with_Members.pptx
+++ b/report/Kenya_Road_Accident_Analytics_10_Slide_Deck_with_Members.pptx
@@ -5082,45 +5082,6 @@
       </p:sp>
       <p:sp>
         <p:nvSpPr>
-          <p:cNvPr id="10" name="Text 8"/>
-          <p:cNvSpPr/>
-          <p:nvPr/>
-        </p:nvSpPr>
-        <p:spPr>
-          <a:xfrm>
-            <a:off x="7406640" y="5440680"/>
-            <a:ext cx="2651760" cy="274320"/>
-          </a:xfrm>
-          <a:prstGeom prst="rect">
-            <a:avLst/>
-          </a:prstGeom>
-          <a:noFill/>
-          <a:ln/>
-        </p:spPr>
-        <p:txBody>
-          <a:bodyPr wrap="square" rtlCol="0" anchor="ctr"/>
-          <a:lstStyle/>
-          <a:p>
-            <a:pPr marL="0" indent="0" algn="ctr">
-              <a:buNone/>
-            </a:pPr>
-            <a:r>
-              <a:rPr lang="en-US" sz="1800" b="1" dirty="0">
-                <a:solidFill>
-                  <a:srgbClr val="1C6E42"/>
-                </a:solidFill>
-                <a:latin typeface="Aptos Display" pitchFamily="34" charset="0"/>
-                <a:ea typeface="Aptos Display" pitchFamily="34" charset="-122"/>
-                <a:cs typeface="Aptos Display" pitchFamily="34" charset="-120"/>
-              </a:rPr>
-              <a:t>Questions and Discussion</a:t>
-            </a:r>
-            <a:endParaRPr lang="en-US" sz="1800" dirty="0"/>
-          </a:p>
-        </p:txBody>
-      </p:sp>
-      <p:sp>
-        <p:nvSpPr>
           <p:cNvPr id="11" name="Text 9"/>
           <p:cNvSpPr/>
           <p:nvPr/>
@@ -6263,96 +6224,6 @@
       </p:sp>
       <p:sp>
         <p:nvSpPr>
-          <p:cNvPr id="7" name="Shape 5"/>
-          <p:cNvSpPr/>
-          <p:nvPr/>
-        </p:nvSpPr>
-        <p:spPr>
-          <a:xfrm>
-            <a:off x="5257800" y="868680"/>
-            <a:ext cx="6492240" cy="5486400"/>
-          </a:xfrm>
-          <a:prstGeom prst="roundRect">
-            <a:avLst>
-              <a:gd name="adj" fmla="val 1333"/>
-            </a:avLst>
-          </a:prstGeom>
-          <a:solidFill>
-            <a:srgbClr val="F8FBF7"/>
-          </a:solidFill>
-          <a:ln w="12700">
-            <a:solidFill>
-              <a:srgbClr val="2E9B92"/>
-            </a:solidFill>
-            <a:prstDash val="solid"/>
-          </a:ln>
-        </p:spPr>
-      </p:sp>
-      <p:pic>
-        <p:nvPicPr>
-          <p:cNvPr id="8" name="Image 0" descr="C:\Users\Administrator\Desktop\kenya_road_safety_project\report\extracted_doc_images\image2.png"/>
-          <p:cNvPicPr>
-            <a:picLocks noChangeAspect="1"/>
-          </p:cNvPicPr>
-          <p:nvPr/>
-        </p:nvPicPr>
-        <p:blipFill>
-          <a:blip r:embed="rId3"/>
-          <a:stretch>
-            <a:fillRect/>
-          </a:stretch>
-        </p:blipFill>
-        <p:spPr>
-          <a:xfrm>
-            <a:off x="5486400" y="1170432"/>
-            <a:ext cx="5989320" cy="4846320"/>
-          </a:xfrm>
-          <a:prstGeom prst="rect">
-            <a:avLst/>
-          </a:prstGeom>
-        </p:spPr>
-      </p:pic>
-      <p:sp>
-        <p:nvSpPr>
-          <p:cNvPr id="9" name="Text 6"/>
-          <p:cNvSpPr/>
-          <p:nvPr/>
-        </p:nvSpPr>
-        <p:spPr>
-          <a:xfrm>
-            <a:off x="5577840" y="5897880"/>
-            <a:ext cx="5669280" cy="182880"/>
-          </a:xfrm>
-          <a:prstGeom prst="rect">
-            <a:avLst/>
-          </a:prstGeom>
-          <a:noFill/>
-          <a:ln/>
-        </p:spPr>
-        <p:txBody>
-          <a:bodyPr wrap="square" rtlCol="0" anchor="ctr"/>
-          <a:lstStyle/>
-          <a:p>
-            <a:pPr marL="0" indent="0" algn="ctr">
-              <a:buNone/>
-            </a:pPr>
-            <a:r>
-              <a:rPr lang="en-US" sz="1100" dirty="0">
-                <a:solidFill>
-                  <a:srgbClr val="566B5B"/>
-                </a:solidFill>
-                <a:latin typeface="Aptos" pitchFamily="34" charset="0"/>
-                <a:ea typeface="Aptos" pitchFamily="34" charset="-122"/>
-                <a:cs typeface="Aptos" pitchFamily="34" charset="-120"/>
-              </a:rPr>
-              <a:t>Architecture Diagram from the project documentation</a:t>
-            </a:r>
-            <a:endParaRPr lang="en-US" sz="1100" dirty="0"/>
-          </a:p>
-        </p:txBody>
-      </p:sp>
-      <p:sp>
-        <p:nvSpPr>
           <p:cNvPr id="10" name="Text 7"/>
           <p:cNvSpPr/>
           <p:nvPr/>
@@ -6527,13 +6398,13 @@
       </p:sp>
       <p:sp>
         <p:nvSpPr>
-          <p:cNvPr id="5" name="Shape 3"/>
-          <p:cNvSpPr/>
-          <p:nvPr/>
-        </p:nvSpPr>
-        <p:spPr>
-          <a:xfrm>
-            <a:off x="502920" y="1051560"/>
+          <p:cNvPr id="6" name="Shape 4"/>
+          <p:cNvSpPr/>
+          <p:nvPr/>
+        </p:nvSpPr>
+        <p:spPr>
+          <a:xfrm>
+            <a:off x="2743200" y="976745"/>
             <a:ext cx="5486400" cy="5394960"/>
           </a:xfrm>
           <a:prstGeom prst="roundRect">
@@ -6554,40 +6425,13 @@
       </p:sp>
       <p:sp>
         <p:nvSpPr>
-          <p:cNvPr id="6" name="Shape 4"/>
-          <p:cNvSpPr/>
-          <p:nvPr/>
-        </p:nvSpPr>
-        <p:spPr>
-          <a:xfrm>
-            <a:off x="6217920" y="1051560"/>
-            <a:ext cx="5486400" cy="5394960"/>
-          </a:xfrm>
-          <a:prstGeom prst="roundRect">
-            <a:avLst>
-              <a:gd name="adj" fmla="val 1356"/>
-            </a:avLst>
-          </a:prstGeom>
-          <a:solidFill>
-            <a:srgbClr val="F8FBF7"/>
-          </a:solidFill>
-          <a:ln w="12700">
-            <a:solidFill>
-              <a:srgbClr val="2E9B92"/>
-            </a:solidFill>
-            <a:prstDash val="solid"/>
-          </a:ln>
-        </p:spPr>
-      </p:sp>
-      <p:sp>
-        <p:nvSpPr>
-          <p:cNvPr id="7" name="Text 5"/>
-          <p:cNvSpPr/>
-          <p:nvPr/>
-        </p:nvSpPr>
-        <p:spPr>
-          <a:xfrm>
-            <a:off x="731520" y="1170432"/>
+          <p:cNvPr id="8" name="Text 6"/>
+          <p:cNvSpPr/>
+          <p:nvPr/>
+        </p:nvSpPr>
+        <p:spPr>
+          <a:xfrm>
+            <a:off x="4023360" y="1069848"/>
             <a:ext cx="2926080" cy="201168"/>
           </a:xfrm>
           <a:prstGeom prst="rect">
@@ -6612,45 +6456,6 @@
                 <a:ea typeface="Aptos Display" pitchFamily="34" charset="-122"/>
                 <a:cs typeface="Aptos Display" pitchFamily="34" charset="-120"/>
               </a:rPr>
-              <a:t>Architecture Diagram</a:t>
-            </a:r>
-            <a:endParaRPr lang="en-US" sz="1600" dirty="0"/>
-          </a:p>
-        </p:txBody>
-      </p:sp>
-      <p:sp>
-        <p:nvSpPr>
-          <p:cNvPr id="8" name="Text 6"/>
-          <p:cNvSpPr/>
-          <p:nvPr/>
-        </p:nvSpPr>
-        <p:spPr>
-          <a:xfrm>
-            <a:off x="6446520" y="1170432"/>
-            <a:ext cx="2926080" cy="201168"/>
-          </a:xfrm>
-          <a:prstGeom prst="rect">
-            <a:avLst/>
-          </a:prstGeom>
-          <a:noFill/>
-          <a:ln/>
-        </p:spPr>
-        <p:txBody>
-          <a:bodyPr wrap="square" rtlCol="0" anchor="ctr"/>
-          <a:lstStyle/>
-          <a:p>
-            <a:pPr marL="0" indent="0">
-              <a:buNone/>
-            </a:pPr>
-            <a:r>
-              <a:rPr lang="en-US" sz="1600" b="1" dirty="0">
-                <a:solidFill>
-                  <a:srgbClr val="2E9B92"/>
-                </a:solidFill>
-                <a:latin typeface="Aptos Display" pitchFamily="34" charset="0"/>
-                <a:ea typeface="Aptos Display" pitchFamily="34" charset="-122"/>
-                <a:cs typeface="Aptos Display" pitchFamily="34" charset="-120"/>
-              </a:rPr>
               <a:t>Data Flow Diagram - Level 0</a:t>
             </a:r>
             <a:endParaRPr lang="en-US" sz="1600" dirty="0"/>
@@ -6659,7 +6464,7 @@
       </p:sp>
       <p:pic>
         <p:nvPicPr>
-          <p:cNvPr id="9" name="Image 0" descr="C:\Users\Administrator\Desktop\kenya_road_safety_project\report\extracted_doc_images\image2.png"/>
+          <p:cNvPr id="10" name="Image 1" descr="C:\Users\Administrator\Desktop\kenya_road_safety_project\report\extracted_doc_images\image3.png"/>
           <p:cNvPicPr>
             <a:picLocks noChangeAspect="1"/>
           </p:cNvPicPr>
@@ -6673,31 +6478,7 @@
         </p:blipFill>
         <p:spPr>
           <a:xfrm>
-            <a:off x="749808" y="1463040"/>
-            <a:ext cx="4983480" cy="4663440"/>
-          </a:xfrm>
-          <a:prstGeom prst="rect">
-            <a:avLst/>
-          </a:prstGeom>
-        </p:spPr>
-      </p:pic>
-      <p:pic>
-        <p:nvPicPr>
-          <p:cNvPr id="10" name="Image 1" descr="C:\Users\Administrator\Desktop\kenya_road_safety_project\report\extracted_doc_images\image3.png"/>
-          <p:cNvPicPr>
-            <a:picLocks noChangeAspect="1"/>
-          </p:cNvPicPr>
-          <p:nvPr/>
-        </p:nvPicPr>
-        <p:blipFill>
-          <a:blip r:embed="rId4"/>
-          <a:stretch>
-            <a:fillRect/>
-          </a:stretch>
-        </p:blipFill>
-        <p:spPr>
-          <a:xfrm>
-            <a:off x="6446520" y="1463040"/>
+            <a:off x="3246120" y="1463040"/>
             <a:ext cx="4983480" cy="4663440"/>
           </a:xfrm>
           <a:prstGeom prst="rect">
@@ -6908,33 +6689,6 @@
       </p:sp>
       <p:sp>
         <p:nvSpPr>
-          <p:cNvPr id="6" name="Shape 4"/>
-          <p:cNvSpPr/>
-          <p:nvPr/>
-        </p:nvSpPr>
-        <p:spPr>
-          <a:xfrm>
-            <a:off x="6217920" y="1051560"/>
-            <a:ext cx="5486400" cy="5394960"/>
-          </a:xfrm>
-          <a:prstGeom prst="roundRect">
-            <a:avLst>
-              <a:gd name="adj" fmla="val 1356"/>
-            </a:avLst>
-          </a:prstGeom>
-          <a:solidFill>
-            <a:srgbClr val="F8FBF7"/>
-          </a:solidFill>
-          <a:ln w="12700">
-            <a:solidFill>
-              <a:srgbClr val="8F68BF"/>
-            </a:solidFill>
-            <a:prstDash val="solid"/>
-          </a:ln>
-        </p:spPr>
-      </p:sp>
-      <p:sp>
-        <p:nvSpPr>
           <p:cNvPr id="7" name="Text 5"/>
           <p:cNvSpPr/>
           <p:nvPr/>
@@ -6967,45 +6721,6 @@
                 <a:cs typeface="Aptos Display" pitchFamily="34" charset="-120"/>
               </a:rPr>
               <a:t>Data Flow Diagram - Level 1</a:t>
-            </a:r>
-            <a:endParaRPr lang="en-US" sz="1600" dirty="0"/>
-          </a:p>
-        </p:txBody>
-      </p:sp>
-      <p:sp>
-        <p:nvSpPr>
-          <p:cNvPr id="8" name="Text 6"/>
-          <p:cNvSpPr/>
-          <p:nvPr/>
-        </p:nvSpPr>
-        <p:spPr>
-          <a:xfrm>
-            <a:off x="6446520" y="1170432"/>
-            <a:ext cx="2926080" cy="201168"/>
-          </a:xfrm>
-          <a:prstGeom prst="rect">
-            <a:avLst/>
-          </a:prstGeom>
-          <a:noFill/>
-          <a:ln/>
-        </p:spPr>
-        <p:txBody>
-          <a:bodyPr wrap="square" rtlCol="0" anchor="ctr"/>
-          <a:lstStyle/>
-          <a:p>
-            <a:pPr marL="0" indent="0">
-              <a:buNone/>
-            </a:pPr>
-            <a:r>
-              <a:rPr lang="en-US" sz="1600" b="1" dirty="0">
-                <a:solidFill>
-                  <a:srgbClr val="8F68BF"/>
-                </a:solidFill>
-                <a:latin typeface="Aptos Display" pitchFamily="34" charset="0"/>
-                <a:ea typeface="Aptos Display" pitchFamily="34" charset="-122"/>
-                <a:cs typeface="Aptos Display" pitchFamily="34" charset="-120"/>
-              </a:rPr>
-              <a:t>Use Case / ERD Diagram</a:t>
             </a:r>
             <a:endParaRPr lang="en-US" sz="1600" dirty="0"/>
           </a:p>
@@ -7028,30 +6743,6 @@
         <p:spPr>
           <a:xfrm>
             <a:off x="749808" y="1463040"/>
-            <a:ext cx="4983480" cy="4663440"/>
-          </a:xfrm>
-          <a:prstGeom prst="rect">
-            <a:avLst/>
-          </a:prstGeom>
-        </p:spPr>
-      </p:pic>
-      <p:pic>
-        <p:nvPicPr>
-          <p:cNvPr id="10" name="Image 1" descr="C:\Users\Administrator\Desktop\kenya_road_safety_project\report\extracted_doc_images\image5.png"/>
-          <p:cNvPicPr>
-            <a:picLocks noChangeAspect="1"/>
-          </p:cNvPicPr>
-          <p:nvPr/>
-        </p:nvPicPr>
-        <p:blipFill>
-          <a:blip r:embed="rId4"/>
-          <a:stretch>
-            <a:fillRect/>
-          </a:stretch>
-        </p:blipFill>
-        <p:spPr>
-          <a:xfrm>
-            <a:off x="6446520" y="1463040"/>
             <a:ext cx="4983480" cy="4663440"/>
           </a:xfrm>
           <a:prstGeom prst="rect">
